--- a/safety-watch-platform.pptx
+++ b/safety-watch-platform.pptx
@@ -4392,7 +4392,7 @@
         </p:nvSpPr>
         <p:spPr>
           <a:xfrm>
-            <a:off x="5786431" y="4247142"/>
+            <a:off x="5752392" y="4114795"/>
             <a:ext cx="2414842" cy="745955"/>
           </a:xfrm>
           <a:prstGeom prst="rect">
@@ -4935,6 +4935,679 @@
           </a:p>
         </p:txBody>
       </p:sp>
+      <p:cxnSp>
+        <p:nvCxnSpPr>
+          <p:cNvPr id="5" name="직선 화살표 연결선 4">
+            <a:extLst>
+              <a:ext uri="{FF2B5EF4-FFF2-40B4-BE49-F238E27FC236}">
+                <a16:creationId xmlns:a16="http://schemas.microsoft.com/office/drawing/2014/main" id="{07FA490D-AF8E-D9E6-6933-7766DDC3DA33}"/>
+              </a:ext>
+            </a:extLst>
+          </p:cNvPr>
+          <p:cNvCxnSpPr>
+            <a:cxnSpLocks/>
+            <a:stCxn id="8" idx="2"/>
+          </p:cNvCxnSpPr>
+          <p:nvPr/>
+        </p:nvCxnSpPr>
+        <p:spPr>
+          <a:xfrm>
+            <a:off x="6305049" y="1203152"/>
+            <a:ext cx="0" cy="1479890"/>
+          </a:xfrm>
+          <a:prstGeom prst="straightConnector1">
+            <a:avLst/>
+          </a:prstGeom>
+          <a:ln>
+            <a:tailEnd type="triangle"/>
+          </a:ln>
+        </p:spPr>
+        <p:style>
+          <a:lnRef idx="2">
+            <a:schemeClr val="dk1"/>
+          </a:lnRef>
+          <a:fillRef idx="0">
+            <a:schemeClr val="dk1"/>
+          </a:fillRef>
+          <a:effectRef idx="1">
+            <a:schemeClr val="dk1"/>
+          </a:effectRef>
+          <a:fontRef idx="minor">
+            <a:schemeClr val="tx1"/>
+          </a:fontRef>
+        </p:style>
+      </p:cxnSp>
+      <p:cxnSp>
+        <p:nvCxnSpPr>
+          <p:cNvPr id="11" name="직선 화살표 연결선 10">
+            <a:extLst>
+              <a:ext uri="{FF2B5EF4-FFF2-40B4-BE49-F238E27FC236}">
+                <a16:creationId xmlns:a16="http://schemas.microsoft.com/office/drawing/2014/main" id="{DCBE5BA5-A061-77F5-4150-57C349DA91A0}"/>
+              </a:ext>
+            </a:extLst>
+          </p:cNvPr>
+          <p:cNvCxnSpPr>
+            <a:stCxn id="9" idx="2"/>
+            <a:endCxn id="4" idx="0"/>
+          </p:cNvCxnSpPr>
+          <p:nvPr/>
+        </p:nvCxnSpPr>
+        <p:spPr>
+          <a:xfrm>
+            <a:off x="8253663" y="1203152"/>
+            <a:ext cx="0" cy="1479890"/>
+          </a:xfrm>
+          <a:prstGeom prst="straightConnector1">
+            <a:avLst/>
+          </a:prstGeom>
+          <a:ln>
+            <a:tailEnd type="triangle"/>
+          </a:ln>
+        </p:spPr>
+        <p:style>
+          <a:lnRef idx="2">
+            <a:schemeClr val="dk1"/>
+          </a:lnRef>
+          <a:fillRef idx="0">
+            <a:schemeClr val="dk1"/>
+          </a:fillRef>
+          <a:effectRef idx="1">
+            <a:schemeClr val="dk1"/>
+          </a:effectRef>
+          <a:fontRef idx="minor">
+            <a:schemeClr val="tx1"/>
+          </a:fontRef>
+        </p:style>
+      </p:cxnSp>
+      <p:cxnSp>
+        <p:nvCxnSpPr>
+          <p:cNvPr id="23" name="직선 화살표 연결선 22">
+            <a:extLst>
+              <a:ext uri="{FF2B5EF4-FFF2-40B4-BE49-F238E27FC236}">
+                <a16:creationId xmlns:a16="http://schemas.microsoft.com/office/drawing/2014/main" id="{8E780B50-A75E-A27E-DC60-155AF16FD3E7}"/>
+              </a:ext>
+            </a:extLst>
+          </p:cNvPr>
+          <p:cNvCxnSpPr>
+            <a:cxnSpLocks/>
+            <a:stCxn id="10" idx="2"/>
+          </p:cNvCxnSpPr>
+          <p:nvPr/>
+        </p:nvCxnSpPr>
+        <p:spPr>
+          <a:xfrm>
+            <a:off x="10202277" y="1203152"/>
+            <a:ext cx="0" cy="1479890"/>
+          </a:xfrm>
+          <a:prstGeom prst="straightConnector1">
+            <a:avLst/>
+          </a:prstGeom>
+          <a:ln>
+            <a:tailEnd type="triangle"/>
+          </a:ln>
+        </p:spPr>
+        <p:style>
+          <a:lnRef idx="2">
+            <a:schemeClr val="dk1"/>
+          </a:lnRef>
+          <a:fillRef idx="0">
+            <a:schemeClr val="dk1"/>
+          </a:fillRef>
+          <a:effectRef idx="1">
+            <a:schemeClr val="dk1"/>
+          </a:effectRef>
+          <a:fontRef idx="minor">
+            <a:schemeClr val="tx1"/>
+          </a:fontRef>
+        </p:style>
+      </p:cxnSp>
+      <p:sp>
+        <p:nvSpPr>
+          <p:cNvPr id="27" name="TextBox 26">
+            <a:extLst>
+              <a:ext uri="{FF2B5EF4-FFF2-40B4-BE49-F238E27FC236}">
+                <a16:creationId xmlns:a16="http://schemas.microsoft.com/office/drawing/2014/main" id="{360E341D-C7DE-EB34-1A6D-C3851E0063F6}"/>
+              </a:ext>
+            </a:extLst>
+          </p:cNvPr>
+          <p:cNvSpPr txBox="1"/>
+          <p:nvPr/>
+        </p:nvSpPr>
+        <p:spPr>
+          <a:xfrm>
+            <a:off x="5884720" y="1765612"/>
+            <a:ext cx="958268" cy="400110"/>
+          </a:xfrm>
+          <a:prstGeom prst="rect">
+            <a:avLst/>
+          </a:prstGeom>
+          <a:solidFill>
+            <a:schemeClr val="bg1"/>
+          </a:solidFill>
+        </p:spPr>
+        <p:txBody>
+          <a:bodyPr wrap="square" rtlCol="0">
+            <a:spAutoFit/>
+          </a:bodyPr>
+          <a:lstStyle/>
+          <a:p>
+            <a:pPr algn="ctr"/>
+            <a:r>
+              <a:rPr lang="en-US" altLang="ko-KR" sz="1000">
+                <a:latin typeface="KoPubWorld돋움체_Pro Bold" panose="00000800000000000000" pitchFamily="50" charset="-127"/>
+                <a:ea typeface="KoPubWorld돋움체_Pro Bold" panose="00000800000000000000" pitchFamily="50" charset="-127"/>
+                <a:cs typeface="KoPubWorld돋움체_Pro Bold" panose="00000800000000000000" pitchFamily="50" charset="-127"/>
+              </a:rPr>
+              <a:t>REST</a:t>
+            </a:r>
+            <a:r>
+              <a:rPr lang="ko-KR" altLang="en-US" sz="1000">
+                <a:latin typeface="KoPubWorld돋움체_Pro Bold" panose="00000800000000000000" pitchFamily="50" charset="-127"/>
+                <a:ea typeface="KoPubWorld돋움체_Pro Bold" panose="00000800000000000000" pitchFamily="50" charset="-127"/>
+                <a:cs typeface="KoPubWorld돋움체_Pro Bold" panose="00000800000000000000" pitchFamily="50" charset="-127"/>
+              </a:rPr>
+              <a:t> </a:t>
+            </a:r>
+            <a:r>
+              <a:rPr lang="en-US" altLang="ko-KR" sz="1000">
+                <a:latin typeface="KoPubWorld돋움체_Pro Bold" panose="00000800000000000000" pitchFamily="50" charset="-127"/>
+                <a:ea typeface="KoPubWorld돋움체_Pro Bold" panose="00000800000000000000" pitchFamily="50" charset="-127"/>
+                <a:cs typeface="KoPubWorld돋움체_Pro Bold" panose="00000800000000000000" pitchFamily="50" charset="-127"/>
+              </a:rPr>
+              <a:t>/</a:t>
+            </a:r>
+            <a:r>
+              <a:rPr lang="ko-KR" altLang="en-US" sz="1000">
+                <a:latin typeface="KoPubWorld돋움체_Pro Bold" panose="00000800000000000000" pitchFamily="50" charset="-127"/>
+                <a:ea typeface="KoPubWorld돋움체_Pro Bold" panose="00000800000000000000" pitchFamily="50" charset="-127"/>
+                <a:cs typeface="KoPubWorld돋움체_Pro Bold" panose="00000800000000000000" pitchFamily="50" charset="-127"/>
+              </a:rPr>
+              <a:t> </a:t>
+            </a:r>
+            <a:r>
+              <a:rPr lang="en-US" altLang="ko-KR" sz="1000">
+                <a:latin typeface="KoPubWorld돋움체_Pro Bold" panose="00000800000000000000" pitchFamily="50" charset="-127"/>
+                <a:ea typeface="KoPubWorld돋움체_Pro Bold" panose="00000800000000000000" pitchFamily="50" charset="-127"/>
+                <a:cs typeface="KoPubWorld돋움체_Pro Bold" panose="00000800000000000000" pitchFamily="50" charset="-127"/>
+              </a:rPr>
+              <a:t>Webhook</a:t>
+            </a:r>
+            <a:endParaRPr lang="ko-KR" altLang="en-US" sz="1000">
+              <a:latin typeface="KoPubWorld돋움체_Pro Bold" panose="00000800000000000000" pitchFamily="50" charset="-127"/>
+              <a:ea typeface="KoPubWorld돋움체_Pro Bold" panose="00000800000000000000" pitchFamily="50" charset="-127"/>
+              <a:cs typeface="KoPubWorld돋움체_Pro Bold" panose="00000800000000000000" pitchFamily="50" charset="-127"/>
+            </a:endParaRPr>
+          </a:p>
+        </p:txBody>
+      </p:sp>
+      <p:sp>
+        <p:nvSpPr>
+          <p:cNvPr id="28" name="TextBox 27">
+            <a:extLst>
+              <a:ext uri="{FF2B5EF4-FFF2-40B4-BE49-F238E27FC236}">
+                <a16:creationId xmlns:a16="http://schemas.microsoft.com/office/drawing/2014/main" id="{3BBEC467-1D14-C3B1-E1D1-E6C0965D4B68}"/>
+              </a:ext>
+            </a:extLst>
+          </p:cNvPr>
+          <p:cNvSpPr txBox="1"/>
+          <p:nvPr/>
+        </p:nvSpPr>
+        <p:spPr>
+          <a:xfrm>
+            <a:off x="7833333" y="1765612"/>
+            <a:ext cx="958268" cy="400110"/>
+          </a:xfrm>
+          <a:prstGeom prst="rect">
+            <a:avLst/>
+          </a:prstGeom>
+          <a:solidFill>
+            <a:schemeClr val="bg1"/>
+          </a:solidFill>
+        </p:spPr>
+        <p:txBody>
+          <a:bodyPr wrap="square" rtlCol="0">
+            <a:spAutoFit/>
+          </a:bodyPr>
+          <a:lstStyle/>
+          <a:p>
+            <a:pPr algn="ctr"/>
+            <a:r>
+              <a:rPr lang="en-US" altLang="ko-KR" sz="1000">
+                <a:latin typeface="KoPubWorld돋움체_Pro Bold" panose="00000800000000000000" pitchFamily="50" charset="-127"/>
+                <a:ea typeface="KoPubWorld돋움체_Pro Bold" panose="00000800000000000000" pitchFamily="50" charset="-127"/>
+                <a:cs typeface="KoPubWorld돋움체_Pro Bold" panose="00000800000000000000" pitchFamily="50" charset="-127"/>
+              </a:rPr>
+              <a:t>MQTT</a:t>
+            </a:r>
+            <a:r>
+              <a:rPr lang="ko-KR" altLang="en-US" sz="1000">
+                <a:latin typeface="KoPubWorld돋움체_Pro Bold" panose="00000800000000000000" pitchFamily="50" charset="-127"/>
+                <a:ea typeface="KoPubWorld돋움체_Pro Bold" panose="00000800000000000000" pitchFamily="50" charset="-127"/>
+                <a:cs typeface="KoPubWorld돋움체_Pro Bold" panose="00000800000000000000" pitchFamily="50" charset="-127"/>
+              </a:rPr>
+              <a:t> </a:t>
+            </a:r>
+            <a:r>
+              <a:rPr lang="en-US" altLang="ko-KR" sz="1000">
+                <a:latin typeface="KoPubWorld돋움체_Pro Bold" panose="00000800000000000000" pitchFamily="50" charset="-127"/>
+                <a:ea typeface="KoPubWorld돋움체_Pro Bold" panose="00000800000000000000" pitchFamily="50" charset="-127"/>
+                <a:cs typeface="KoPubWorld돋움체_Pro Bold" panose="00000800000000000000" pitchFamily="50" charset="-127"/>
+              </a:rPr>
+              <a:t>/</a:t>
+            </a:r>
+            <a:r>
+              <a:rPr lang="ko-KR" altLang="en-US" sz="1000">
+                <a:latin typeface="KoPubWorld돋움체_Pro Bold" panose="00000800000000000000" pitchFamily="50" charset="-127"/>
+                <a:ea typeface="KoPubWorld돋움체_Pro Bold" panose="00000800000000000000" pitchFamily="50" charset="-127"/>
+                <a:cs typeface="KoPubWorld돋움체_Pro Bold" panose="00000800000000000000" pitchFamily="50" charset="-127"/>
+              </a:rPr>
+              <a:t> </a:t>
+            </a:r>
+            <a:r>
+              <a:rPr lang="en-US" altLang="ko-KR" sz="1000">
+                <a:latin typeface="KoPubWorld돋움체_Pro Bold" panose="00000800000000000000" pitchFamily="50" charset="-127"/>
+                <a:ea typeface="KoPubWorld돋움체_Pro Bold" panose="00000800000000000000" pitchFamily="50" charset="-127"/>
+                <a:cs typeface="KoPubWorld돋움체_Pro Bold" panose="00000800000000000000" pitchFamily="50" charset="-127"/>
+              </a:rPr>
+              <a:t>Webhook</a:t>
+            </a:r>
+            <a:endParaRPr lang="ko-KR" altLang="en-US" sz="1000">
+              <a:latin typeface="KoPubWorld돋움체_Pro Bold" panose="00000800000000000000" pitchFamily="50" charset="-127"/>
+              <a:ea typeface="KoPubWorld돋움체_Pro Bold" panose="00000800000000000000" pitchFamily="50" charset="-127"/>
+              <a:cs typeface="KoPubWorld돋움체_Pro Bold" panose="00000800000000000000" pitchFamily="50" charset="-127"/>
+            </a:endParaRPr>
+          </a:p>
+        </p:txBody>
+      </p:sp>
+      <p:sp>
+        <p:nvSpPr>
+          <p:cNvPr id="29" name="TextBox 28">
+            <a:extLst>
+              <a:ext uri="{FF2B5EF4-FFF2-40B4-BE49-F238E27FC236}">
+                <a16:creationId xmlns:a16="http://schemas.microsoft.com/office/drawing/2014/main" id="{1A947A4A-E627-9A06-8A20-BF67008D5A88}"/>
+              </a:ext>
+            </a:extLst>
+          </p:cNvPr>
+          <p:cNvSpPr txBox="1"/>
+          <p:nvPr/>
+        </p:nvSpPr>
+        <p:spPr>
+          <a:xfrm>
+            <a:off x="9723142" y="1819986"/>
+            <a:ext cx="958268" cy="246221"/>
+          </a:xfrm>
+          <a:prstGeom prst="rect">
+            <a:avLst/>
+          </a:prstGeom>
+          <a:solidFill>
+            <a:schemeClr val="bg1"/>
+          </a:solidFill>
+        </p:spPr>
+        <p:txBody>
+          <a:bodyPr wrap="square" rtlCol="0">
+            <a:spAutoFit/>
+          </a:bodyPr>
+          <a:lstStyle/>
+          <a:p>
+            <a:pPr algn="ctr"/>
+            <a:r>
+              <a:rPr lang="en-US" altLang="ko-KR" sz="1000">
+                <a:latin typeface="KoPubWorld돋움체_Pro Bold" panose="00000800000000000000" pitchFamily="50" charset="-127"/>
+                <a:ea typeface="KoPubWorld돋움체_Pro Bold" panose="00000800000000000000" pitchFamily="50" charset="-127"/>
+                <a:cs typeface="KoPubWorld돋움체_Pro Bold" panose="00000800000000000000" pitchFamily="50" charset="-127"/>
+              </a:rPr>
+              <a:t>REST</a:t>
+            </a:r>
+            <a:endParaRPr lang="ko-KR" altLang="en-US" sz="1000">
+              <a:latin typeface="KoPubWorld돋움체_Pro Bold" panose="00000800000000000000" pitchFamily="50" charset="-127"/>
+              <a:ea typeface="KoPubWorld돋움체_Pro Bold" panose="00000800000000000000" pitchFamily="50" charset="-127"/>
+              <a:cs typeface="KoPubWorld돋움체_Pro Bold" panose="00000800000000000000" pitchFamily="50" charset="-127"/>
+            </a:endParaRPr>
+          </a:p>
+        </p:txBody>
+      </p:sp>
+      <p:cxnSp>
+        <p:nvCxnSpPr>
+          <p:cNvPr id="31" name="연결선: 꺾임 30">
+            <a:extLst>
+              <a:ext uri="{FF2B5EF4-FFF2-40B4-BE49-F238E27FC236}">
+                <a16:creationId xmlns:a16="http://schemas.microsoft.com/office/drawing/2014/main" id="{8220B42B-B8D8-E77B-9157-44BE6209823A}"/>
+              </a:ext>
+            </a:extLst>
+          </p:cNvPr>
+          <p:cNvCxnSpPr>
+            <a:stCxn id="22" idx="3"/>
+            <a:endCxn id="13" idx="1"/>
+          </p:cNvCxnSpPr>
+          <p:nvPr/>
+        </p:nvCxnSpPr>
+        <p:spPr>
+          <a:xfrm flipV="1">
+            <a:off x="3873497" y="4247142"/>
+            <a:ext cx="5265491" cy="1686091"/>
+          </a:xfrm>
+          <a:prstGeom prst="bentConnector3">
+            <a:avLst>
+              <a:gd name="adj1" fmla="val 90696"/>
+            </a:avLst>
+          </a:prstGeom>
+          <a:ln>
+            <a:tailEnd type="triangle"/>
+          </a:ln>
+        </p:spPr>
+        <p:style>
+          <a:lnRef idx="2">
+            <a:schemeClr val="dk1"/>
+          </a:lnRef>
+          <a:fillRef idx="0">
+            <a:schemeClr val="dk1"/>
+          </a:fillRef>
+          <a:effectRef idx="1">
+            <a:schemeClr val="dk1"/>
+          </a:effectRef>
+          <a:fontRef idx="minor">
+            <a:schemeClr val="tx1"/>
+          </a:fontRef>
+        </p:style>
+      </p:cxnSp>
+      <p:cxnSp>
+        <p:nvCxnSpPr>
+          <p:cNvPr id="34" name="직선 화살표 연결선 33">
+            <a:extLst>
+              <a:ext uri="{FF2B5EF4-FFF2-40B4-BE49-F238E27FC236}">
+                <a16:creationId xmlns:a16="http://schemas.microsoft.com/office/drawing/2014/main" id="{BE82DF15-6016-E4B9-7464-3CDFEB2EBB49}"/>
+              </a:ext>
+            </a:extLst>
+          </p:cNvPr>
+          <p:cNvCxnSpPr>
+            <a:stCxn id="12" idx="2"/>
+            <a:endCxn id="13" idx="0"/>
+          </p:cNvCxnSpPr>
+          <p:nvPr/>
+        </p:nvCxnSpPr>
+        <p:spPr>
+          <a:xfrm>
+            <a:off x="10024312" y="3747828"/>
+            <a:ext cx="1" cy="258683"/>
+          </a:xfrm>
+          <a:prstGeom prst="straightConnector1">
+            <a:avLst/>
+          </a:prstGeom>
+          <a:ln>
+            <a:tailEnd type="triangle"/>
+          </a:ln>
+        </p:spPr>
+        <p:style>
+          <a:lnRef idx="2">
+            <a:schemeClr val="dk1"/>
+          </a:lnRef>
+          <a:fillRef idx="0">
+            <a:schemeClr val="dk1"/>
+          </a:fillRef>
+          <a:effectRef idx="1">
+            <a:schemeClr val="dk1"/>
+          </a:effectRef>
+          <a:fontRef idx="minor">
+            <a:schemeClr val="tx1"/>
+          </a:fontRef>
+        </p:style>
+      </p:cxnSp>
+      <p:cxnSp>
+        <p:nvCxnSpPr>
+          <p:cNvPr id="35" name="직선 화살표 연결선 34">
+            <a:extLst>
+              <a:ext uri="{FF2B5EF4-FFF2-40B4-BE49-F238E27FC236}">
+                <a16:creationId xmlns:a16="http://schemas.microsoft.com/office/drawing/2014/main" id="{61D41797-3044-06A8-4B13-9D150CB3D513}"/>
+              </a:ext>
+            </a:extLst>
+          </p:cNvPr>
+          <p:cNvCxnSpPr>
+            <a:cxnSpLocks/>
+            <a:stCxn id="13" idx="2"/>
+            <a:endCxn id="14" idx="0"/>
+          </p:cNvCxnSpPr>
+          <p:nvPr/>
+        </p:nvCxnSpPr>
+        <p:spPr>
+          <a:xfrm>
+            <a:off x="10024313" y="4487773"/>
+            <a:ext cx="0" cy="252663"/>
+          </a:xfrm>
+          <a:prstGeom prst="straightConnector1">
+            <a:avLst/>
+          </a:prstGeom>
+          <a:ln>
+            <a:tailEnd type="triangle"/>
+          </a:ln>
+        </p:spPr>
+        <p:style>
+          <a:lnRef idx="2">
+            <a:schemeClr val="dk1"/>
+          </a:lnRef>
+          <a:fillRef idx="0">
+            <a:schemeClr val="dk1"/>
+          </a:fillRef>
+          <a:effectRef idx="1">
+            <a:schemeClr val="dk1"/>
+          </a:effectRef>
+          <a:fontRef idx="minor">
+            <a:schemeClr val="tx1"/>
+          </a:fontRef>
+        </p:style>
+      </p:cxnSp>
+      <p:cxnSp>
+        <p:nvCxnSpPr>
+          <p:cNvPr id="38" name="직선 화살표 연결선 37">
+            <a:extLst>
+              <a:ext uri="{FF2B5EF4-FFF2-40B4-BE49-F238E27FC236}">
+                <a16:creationId xmlns:a16="http://schemas.microsoft.com/office/drawing/2014/main" id="{9C4663CA-61C4-AE0C-7780-F8A9BE84C659}"/>
+              </a:ext>
+            </a:extLst>
+          </p:cNvPr>
+          <p:cNvCxnSpPr>
+            <a:cxnSpLocks/>
+            <a:stCxn id="14" idx="2"/>
+            <a:endCxn id="15" idx="0"/>
+          </p:cNvCxnSpPr>
+          <p:nvPr/>
+        </p:nvCxnSpPr>
+        <p:spPr>
+          <a:xfrm flipH="1">
+            <a:off x="10024312" y="5221698"/>
+            <a:ext cx="1" cy="258683"/>
+          </a:xfrm>
+          <a:prstGeom prst="straightConnector1">
+            <a:avLst/>
+          </a:prstGeom>
+          <a:ln>
+            <a:tailEnd type="triangle"/>
+          </a:ln>
+        </p:spPr>
+        <p:style>
+          <a:lnRef idx="2">
+            <a:schemeClr val="dk1"/>
+          </a:lnRef>
+          <a:fillRef idx="0">
+            <a:schemeClr val="dk1"/>
+          </a:fillRef>
+          <a:effectRef idx="1">
+            <a:schemeClr val="dk1"/>
+          </a:effectRef>
+          <a:fontRef idx="minor">
+            <a:schemeClr val="tx1"/>
+          </a:fontRef>
+        </p:style>
+      </p:cxnSp>
+      <p:cxnSp>
+        <p:nvCxnSpPr>
+          <p:cNvPr id="42" name="연결선: 꺾임 41">
+            <a:extLst>
+              <a:ext uri="{FF2B5EF4-FFF2-40B4-BE49-F238E27FC236}">
+                <a16:creationId xmlns:a16="http://schemas.microsoft.com/office/drawing/2014/main" id="{2EDE4E8B-6417-EEF4-9A15-36AC896480C8}"/>
+              </a:ext>
+            </a:extLst>
+          </p:cNvPr>
+          <p:cNvCxnSpPr>
+            <a:stCxn id="19" idx="3"/>
+            <a:endCxn id="17" idx="1"/>
+          </p:cNvCxnSpPr>
+          <p:nvPr/>
+        </p:nvCxnSpPr>
+        <p:spPr>
+          <a:xfrm>
+            <a:off x="3873499" y="2967457"/>
+            <a:ext cx="1878893" cy="1520316"/>
+          </a:xfrm>
+          <a:prstGeom prst="bentConnector3">
+            <a:avLst/>
+          </a:prstGeom>
+          <a:ln>
+            <a:tailEnd type="triangle"/>
+          </a:ln>
+        </p:spPr>
+        <p:style>
+          <a:lnRef idx="2">
+            <a:schemeClr val="dk1"/>
+          </a:lnRef>
+          <a:fillRef idx="0">
+            <a:schemeClr val="dk1"/>
+          </a:fillRef>
+          <a:effectRef idx="1">
+            <a:schemeClr val="dk1"/>
+          </a:effectRef>
+          <a:fontRef idx="minor">
+            <a:schemeClr val="tx1"/>
+          </a:fontRef>
+        </p:style>
+      </p:cxnSp>
+      <p:cxnSp>
+        <p:nvCxnSpPr>
+          <p:cNvPr id="44" name="연결선: 꺾임 43">
+            <a:extLst>
+              <a:ext uri="{FF2B5EF4-FFF2-40B4-BE49-F238E27FC236}">
+                <a16:creationId xmlns:a16="http://schemas.microsoft.com/office/drawing/2014/main" id="{C7183F06-B8F1-3CCB-BC60-6012126F58F4}"/>
+              </a:ext>
+            </a:extLst>
+          </p:cNvPr>
+          <p:cNvCxnSpPr>
+            <a:stCxn id="20" idx="3"/>
+            <a:endCxn id="17" idx="1"/>
+          </p:cNvCxnSpPr>
+          <p:nvPr/>
+        </p:nvCxnSpPr>
+        <p:spPr>
+          <a:xfrm>
+            <a:off x="3873499" y="3954043"/>
+            <a:ext cx="1878893" cy="533730"/>
+          </a:xfrm>
+          <a:prstGeom prst="bentConnector3">
+            <a:avLst/>
+          </a:prstGeom>
+          <a:ln>
+            <a:tailEnd type="triangle"/>
+          </a:ln>
+        </p:spPr>
+        <p:style>
+          <a:lnRef idx="2">
+            <a:schemeClr val="dk1"/>
+          </a:lnRef>
+          <a:fillRef idx="0">
+            <a:schemeClr val="dk1"/>
+          </a:fillRef>
+          <a:effectRef idx="1">
+            <a:schemeClr val="dk1"/>
+          </a:effectRef>
+          <a:fontRef idx="minor">
+            <a:schemeClr val="tx1"/>
+          </a:fontRef>
+        </p:style>
+      </p:cxnSp>
+      <p:cxnSp>
+        <p:nvCxnSpPr>
+          <p:cNvPr id="46" name="연결선: 꺾임 45">
+            <a:extLst>
+              <a:ext uri="{FF2B5EF4-FFF2-40B4-BE49-F238E27FC236}">
+                <a16:creationId xmlns:a16="http://schemas.microsoft.com/office/drawing/2014/main" id="{3F14DB66-FD60-B6F9-C294-D0ACD05DC762}"/>
+              </a:ext>
+            </a:extLst>
+          </p:cNvPr>
+          <p:cNvCxnSpPr>
+            <a:stCxn id="21" idx="3"/>
+            <a:endCxn id="17" idx="1"/>
+          </p:cNvCxnSpPr>
+          <p:nvPr/>
+        </p:nvCxnSpPr>
+        <p:spPr>
+          <a:xfrm flipV="1">
+            <a:off x="3873497" y="4487773"/>
+            <a:ext cx="1878895" cy="455863"/>
+          </a:xfrm>
+          <a:prstGeom prst="bentConnector3">
+            <a:avLst/>
+          </a:prstGeom>
+          <a:ln>
+            <a:tailEnd type="triangle"/>
+          </a:ln>
+        </p:spPr>
+        <p:style>
+          <a:lnRef idx="2">
+            <a:schemeClr val="dk1"/>
+          </a:lnRef>
+          <a:fillRef idx="0">
+            <a:schemeClr val="dk1"/>
+          </a:fillRef>
+          <a:effectRef idx="1">
+            <a:schemeClr val="dk1"/>
+          </a:effectRef>
+          <a:fontRef idx="minor">
+            <a:schemeClr val="tx1"/>
+          </a:fontRef>
+        </p:style>
+      </p:cxnSp>
+      <p:cxnSp>
+        <p:nvCxnSpPr>
+          <p:cNvPr id="48" name="연결선: 꺾임 47">
+            <a:extLst>
+              <a:ext uri="{FF2B5EF4-FFF2-40B4-BE49-F238E27FC236}">
+                <a16:creationId xmlns:a16="http://schemas.microsoft.com/office/drawing/2014/main" id="{66653D6E-B82D-D61D-DB79-F4D76A0C0203}"/>
+              </a:ext>
+            </a:extLst>
+          </p:cNvPr>
+          <p:cNvCxnSpPr>
+            <a:cxnSpLocks/>
+            <a:endCxn id="17" idx="1"/>
+          </p:cNvCxnSpPr>
+          <p:nvPr/>
+        </p:nvCxnSpPr>
+        <p:spPr>
+          <a:xfrm flipV="1">
+            <a:off x="3873497" y="4487773"/>
+            <a:ext cx="1878895" cy="1287379"/>
+          </a:xfrm>
+          <a:prstGeom prst="bentConnector3">
+            <a:avLst>
+              <a:gd name="adj1" fmla="val 50000"/>
+            </a:avLst>
+          </a:prstGeom>
+          <a:ln>
+            <a:tailEnd type="triangle"/>
+          </a:ln>
+        </p:spPr>
+        <p:style>
+          <a:lnRef idx="2">
+            <a:schemeClr val="dk1"/>
+          </a:lnRef>
+          <a:fillRef idx="0">
+            <a:schemeClr val="dk1"/>
+          </a:fillRef>
+          <a:effectRef idx="1">
+            <a:schemeClr val="dk1"/>
+          </a:effectRef>
+          <a:fontRef idx="minor">
+            <a:schemeClr val="tx1"/>
+          </a:fontRef>
+        </p:style>
+      </p:cxnSp>
     </p:spTree>
     <p:extLst>
       <p:ext uri="{BB962C8B-B14F-4D97-AF65-F5344CB8AC3E}">
